--- a/effect-tests/style-library-v1/samples/style-sample-playful-anime.pptx
+++ b/effect-tests/style-library-v1/samples/style-sample-playful-anime.pptx
@@ -902,33 +902,90 @@
           </a:ln>
         </p:spPr>
       </p:sp>
-      <p:pic>
-        <p:nvPicPr>
-          <p:cNvPr id="3" name="Image 0" descr="/Users/dw/Desktop/codex-visual-asset-skills/effect-tests/style-library-v1/assets/background-playful-anime.png">    </p:cNvPr>
-          <p:cNvPicPr>
-            <a:picLocks noChangeAspect="1"/>
-          </p:cNvPicPr>
-          <p:nvPr/>
-        </p:nvPicPr>
-        <p:blipFill>
-          <a:blip r:embed="rId1"/>
-          <a:stretch>
-            <a:fillRect/>
-          </a:stretch>
-        </p:blipFill>
+      <p:sp>
+        <p:nvSpPr>
+          <p:cNvPr id="3" name="Shape 1"/>
+          <p:cNvSpPr/>
+          <p:nvPr/>
+        </p:nvSpPr>
         <p:spPr>
           <a:xfrm>
             <a:off x="0" y="0"/>
-            <a:ext cx="12191695" cy="6858000"/>
-          </a:xfrm>
-          <a:prstGeom prst="rect">
-            <a:avLst/>
-          </a:prstGeom>
-        </p:spPr>
-      </p:pic>
-      <p:sp>
-        <p:nvSpPr>
-          <p:cNvPr id="4" name="Text 1"/>
+            <a:ext cx="82296" cy="6858000"/>
+          </a:xfrm>
+          <a:prstGeom prst="rect">
+            <a:avLst/>
+          </a:prstGeom>
+          <a:solidFill>
+            <a:srgbClr val="F59E0B"/>
+          </a:solidFill>
+          <a:ln w="12700">
+            <a:solidFill>
+              <a:srgbClr val="F59E0B">
+                <a:alpha val="0"/>
+              </a:srgbClr>
+            </a:solidFill>
+            <a:prstDash val="solid"/>
+          </a:ln>
+        </p:spPr>
+      </p:sp>
+      <p:sp>
+        <p:nvSpPr>
+          <p:cNvPr id="4" name="Shape 2"/>
+          <p:cNvSpPr/>
+          <p:nvPr/>
+        </p:nvSpPr>
+        <p:spPr>
+          <a:xfrm>
+            <a:off x="8412480" y="-365760"/>
+            <a:ext cx="2926080" cy="2011680"/>
+          </a:xfrm>
+          <a:prstGeom prst="arc">
+            <a:avLst/>
+          </a:prstGeom>
+          <a:solidFill>
+            <a:srgbClr val="FFC93C"/>
+          </a:solidFill>
+          <a:ln w="12700">
+            <a:solidFill>
+              <a:srgbClr val="333333">
+                <a:alpha val="0"/>
+              </a:srgbClr>
+            </a:solidFill>
+            <a:prstDash val="solid"/>
+          </a:ln>
+        </p:spPr>
+      </p:sp>
+      <p:sp>
+        <p:nvSpPr>
+          <p:cNvPr id="5" name="Shape 3"/>
+          <p:cNvSpPr/>
+          <p:nvPr/>
+        </p:nvSpPr>
+        <p:spPr>
+          <a:xfrm>
+            <a:off x="9875520" y="5212080"/>
+            <a:ext cx="2377440" cy="1645920"/>
+          </a:xfrm>
+          <a:prstGeom prst="arc">
+            <a:avLst/>
+          </a:prstGeom>
+          <a:solidFill>
+            <a:srgbClr val="8FD3FF"/>
+          </a:solidFill>
+          <a:ln w="12700">
+            <a:solidFill>
+              <a:srgbClr val="333333">
+                <a:alpha val="0"/>
+              </a:srgbClr>
+            </a:solidFill>
+            <a:prstDash val="solid"/>
+          </a:ln>
+        </p:spPr>
+      </p:sp>
+      <p:sp>
+        <p:nvSpPr>
+          <p:cNvPr id="6" name="Text 4"/>
           <p:cNvSpPr/>
           <p:nvPr/>
         </p:nvSpPr>
@@ -969,7 +1026,7 @@
       </p:sp>
       <p:sp>
         <p:nvSpPr>
-          <p:cNvPr id="5" name="Text 2"/>
+          <p:cNvPr id="7" name="Text 5"/>
           <p:cNvSpPr/>
           <p:nvPr/>
         </p:nvSpPr>
@@ -1010,7 +1067,7 @@
       </p:sp>
       <p:sp>
         <p:nvSpPr>
-          <p:cNvPr id="6" name="Text 3"/>
+          <p:cNvPr id="8" name="Text 6"/>
           <p:cNvSpPr/>
           <p:nvPr/>
         </p:nvSpPr>
@@ -1051,7 +1108,7 @@
       </p:sp>
       <p:sp>
         <p:nvSpPr>
-          <p:cNvPr id="7" name="Shape 4"/>
+          <p:cNvPr id="9" name="Shape 7"/>
           <p:cNvSpPr/>
           <p:nvPr/>
         </p:nvSpPr>
@@ -1076,7 +1133,7 @@
       </p:sp>
       <p:sp>
         <p:nvSpPr>
-          <p:cNvPr id="8" name="Text 5"/>
+          <p:cNvPr id="10" name="Text 8"/>
           <p:cNvSpPr/>
           <p:nvPr/>
         </p:nvSpPr>
@@ -1117,7 +1174,7 @@
       </p:sp>
       <p:sp>
         <p:nvSpPr>
-          <p:cNvPr id="9" name="Text 6"/>
+          <p:cNvPr id="11" name="Text 9"/>
           <p:cNvSpPr/>
           <p:nvPr/>
         </p:nvSpPr>
@@ -1158,7 +1215,7 @@
       </p:sp>
       <p:sp>
         <p:nvSpPr>
-          <p:cNvPr id="10" name="Shape 7"/>
+          <p:cNvPr id="12" name="Shape 10"/>
           <p:cNvSpPr/>
           <p:nvPr/>
         </p:nvSpPr>
@@ -1185,7 +1242,7 @@
       </p:sp>
       <p:sp>
         <p:nvSpPr>
-          <p:cNvPr id="11" name="Text 8"/>
+          <p:cNvPr id="13" name="Text 11"/>
           <p:cNvSpPr/>
           <p:nvPr/>
         </p:nvSpPr>
@@ -1226,7 +1283,7 @@
       </p:sp>
       <p:sp>
         <p:nvSpPr>
-          <p:cNvPr id="12" name="Shape 9"/>
+          <p:cNvPr id="14" name="Shape 12"/>
           <p:cNvSpPr/>
           <p:nvPr/>
         </p:nvSpPr>
@@ -1253,7 +1310,7 @@
       </p:sp>
       <p:sp>
         <p:nvSpPr>
-          <p:cNvPr id="13" name="Text 10"/>
+          <p:cNvPr id="15" name="Text 13"/>
           <p:cNvSpPr/>
           <p:nvPr/>
         </p:nvSpPr>
@@ -1294,7 +1351,7 @@
       </p:sp>
       <p:sp>
         <p:nvSpPr>
-          <p:cNvPr id="14" name="Shape 11"/>
+          <p:cNvPr id="16" name="Shape 14"/>
           <p:cNvSpPr/>
           <p:nvPr/>
         </p:nvSpPr>
@@ -1321,7 +1378,7 @@
       </p:sp>
       <p:sp>
         <p:nvSpPr>
-          <p:cNvPr id="15" name="Text 12"/>
+          <p:cNvPr id="17" name="Text 15"/>
           <p:cNvSpPr/>
           <p:nvPr/>
         </p:nvSpPr>
@@ -1362,7 +1419,7 @@
       </p:sp>
       <p:sp>
         <p:nvSpPr>
-          <p:cNvPr id="16" name="Shape 13"/>
+          <p:cNvPr id="18" name="Shape 16"/>
           <p:cNvSpPr/>
           <p:nvPr/>
         </p:nvSpPr>
@@ -1387,7 +1444,7 @@
       </p:sp>
       <p:sp>
         <p:nvSpPr>
-          <p:cNvPr id="17" name="Text 14"/>
+          <p:cNvPr id="19" name="Text 17"/>
           <p:cNvSpPr/>
           <p:nvPr/>
         </p:nvSpPr>
@@ -1428,7 +1485,7 @@
       </p:sp>
       <p:sp>
         <p:nvSpPr>
-          <p:cNvPr id="18" name="Text 15"/>
+          <p:cNvPr id="20" name="Text 18"/>
           <p:cNvSpPr/>
           <p:nvPr/>
         </p:nvSpPr>
@@ -1469,7 +1526,7 @@
       </p:sp>
       <p:sp>
         <p:nvSpPr>
-          <p:cNvPr id="19" name="Shape 16"/>
+          <p:cNvPr id="21" name="Shape 19"/>
           <p:cNvSpPr/>
           <p:nvPr/>
         </p:nvSpPr>
@@ -1494,7 +1551,7 @@
       </p:sp>
       <p:sp>
         <p:nvSpPr>
-          <p:cNvPr id="20" name="Text 17"/>
+          <p:cNvPr id="22" name="Text 20"/>
           <p:cNvSpPr/>
           <p:nvPr/>
         </p:nvSpPr>
@@ -1535,7 +1592,7 @@
       </p:sp>
       <p:sp>
         <p:nvSpPr>
-          <p:cNvPr id="21" name="Text 18"/>
+          <p:cNvPr id="23" name="Text 21"/>
           <p:cNvSpPr/>
           <p:nvPr/>
         </p:nvSpPr>
@@ -1576,7 +1633,7 @@
       </p:sp>
       <p:sp>
         <p:nvSpPr>
-          <p:cNvPr id="22" name="Shape 19"/>
+          <p:cNvPr id="24" name="Shape 22"/>
           <p:cNvSpPr/>
           <p:nvPr/>
         </p:nvSpPr>
@@ -1601,7 +1658,7 @@
       </p:sp>
       <p:sp>
         <p:nvSpPr>
-          <p:cNvPr id="23" name="Text 20"/>
+          <p:cNvPr id="25" name="Text 23"/>
           <p:cNvSpPr/>
           <p:nvPr/>
         </p:nvSpPr>
@@ -1642,7 +1699,7 @@
       </p:sp>
       <p:sp>
         <p:nvSpPr>
-          <p:cNvPr id="24" name="Text 21"/>
+          <p:cNvPr id="26" name="Text 24"/>
           <p:cNvSpPr/>
           <p:nvPr/>
         </p:nvSpPr>
@@ -1683,7 +1740,7 @@
       </p:sp>
       <p:sp>
         <p:nvSpPr>
-          <p:cNvPr id="25" name="Text 22"/>
+          <p:cNvPr id="27" name="Text 25"/>
           <p:cNvSpPr/>
           <p:nvPr/>
         </p:nvSpPr>
@@ -1724,7 +1781,7 @@
       </p:sp>
       <p:sp>
         <p:nvSpPr>
-          <p:cNvPr id="26" name="Shape 23"/>
+          <p:cNvPr id="28" name="Shape 26"/>
           <p:cNvSpPr/>
           <p:nvPr/>
         </p:nvSpPr>
@@ -1749,7 +1806,7 @@
       </p:sp>
       <p:sp>
         <p:nvSpPr>
-          <p:cNvPr id="27" name="Shape 24"/>
+          <p:cNvPr id="29" name="Shape 27"/>
           <p:cNvSpPr/>
           <p:nvPr/>
         </p:nvSpPr>
@@ -1774,7 +1831,7 @@
       </p:sp>
       <p:sp>
         <p:nvSpPr>
-          <p:cNvPr id="28" name="Shape 25"/>
+          <p:cNvPr id="30" name="Shape 28"/>
           <p:cNvSpPr/>
           <p:nvPr/>
         </p:nvSpPr>
@@ -1801,7 +1858,7 @@
       </p:sp>
       <p:sp>
         <p:nvSpPr>
-          <p:cNvPr id="29" name="Text 26"/>
+          <p:cNvPr id="31" name="Text 29"/>
           <p:cNvSpPr/>
           <p:nvPr/>
         </p:nvSpPr>
@@ -1842,7 +1899,7 @@
       </p:sp>
       <p:sp>
         <p:nvSpPr>
-          <p:cNvPr id="30" name="Shape 27"/>
+          <p:cNvPr id="32" name="Shape 30"/>
           <p:cNvSpPr/>
           <p:nvPr/>
         </p:nvSpPr>
@@ -1869,7 +1926,7 @@
       </p:sp>
       <p:sp>
         <p:nvSpPr>
-          <p:cNvPr id="31" name="Text 28"/>
+          <p:cNvPr id="33" name="Text 31"/>
           <p:cNvSpPr/>
           <p:nvPr/>
         </p:nvSpPr>
@@ -1910,7 +1967,7 @@
       </p:sp>
       <p:sp>
         <p:nvSpPr>
-          <p:cNvPr id="32" name="Shape 29"/>
+          <p:cNvPr id="34" name="Shape 32"/>
           <p:cNvSpPr/>
           <p:nvPr/>
         </p:nvSpPr>
@@ -1937,7 +1994,7 @@
       </p:sp>
       <p:sp>
         <p:nvSpPr>
-          <p:cNvPr id="33" name="Text 30"/>
+          <p:cNvPr id="35" name="Text 33"/>
           <p:cNvSpPr/>
           <p:nvPr/>
         </p:nvSpPr>
@@ -1978,7 +2035,7 @@
       </p:sp>
       <p:sp>
         <p:nvSpPr>
-          <p:cNvPr id="34" name="Shape 31"/>
+          <p:cNvPr id="36" name="Shape 34"/>
           <p:cNvSpPr/>
           <p:nvPr/>
         </p:nvSpPr>
@@ -2005,7 +2062,7 @@
       </p:sp>
       <p:sp>
         <p:nvSpPr>
-          <p:cNvPr id="35" name="Text 32"/>
+          <p:cNvPr id="37" name="Text 35"/>
           <p:cNvSpPr/>
           <p:nvPr/>
         </p:nvSpPr>

--- a/effect-tests/style-library-v1/samples/style-sample-playful-anime.pptx
+++ b/effect-tests/style-library-v1/samples/style-sample-playful-anime.pptx
@@ -902,49 +902,48 @@
           </a:ln>
         </p:spPr>
       </p:sp>
-      <p:sp>
-        <p:nvSpPr>
-          <p:cNvPr id="3" name="Shape 1"/>
-          <p:cNvSpPr/>
-          <p:nvPr/>
-        </p:nvSpPr>
+      <p:pic>
+        <p:nvPicPr>
+          <p:cNvPr id="3" name="Image 0" descr="/Users/dw/Desktop/codex-visual-ppt-deck-builder/effect-tests/style-library-v1/assets/background-playful-anime.png">    </p:cNvPr>
+          <p:cNvPicPr>
+            <a:picLocks noChangeAspect="1"/>
+          </p:cNvPicPr>
+          <p:nvPr/>
+        </p:nvPicPr>
+        <p:blipFill>
+          <a:blip r:embed="rId1"/>
+          <a:stretch>
+            <a:fillRect/>
+          </a:stretch>
+        </p:blipFill>
         <p:spPr>
           <a:xfrm>
             <a:off x="0" y="0"/>
-            <a:ext cx="82296" cy="6858000"/>
-          </a:xfrm>
-          <a:prstGeom prst="rect">
-            <a:avLst/>
-          </a:prstGeom>
-          <a:solidFill>
-            <a:srgbClr val="F59E0B"/>
-          </a:solidFill>
-          <a:ln w="12700">
-            <a:solidFill>
-              <a:srgbClr val="F59E0B">
-                <a:alpha val="0"/>
-              </a:srgbClr>
-            </a:solidFill>
-            <a:prstDash val="solid"/>
-          </a:ln>
-        </p:spPr>
-      </p:sp>
-      <p:sp>
-        <p:nvSpPr>
-          <p:cNvPr id="4" name="Shape 2"/>
-          <p:cNvSpPr/>
-          <p:nvPr/>
-        </p:nvSpPr>
-        <p:spPr>
-          <a:xfrm>
-            <a:off x="8412480" y="-365760"/>
-            <a:ext cx="2926080" cy="2011680"/>
-          </a:xfrm>
-          <a:prstGeom prst="arc">
-            <a:avLst/>
-          </a:prstGeom>
-          <a:solidFill>
-            <a:srgbClr val="FFC93C"/>
+            <a:ext cx="12191695" cy="6858000"/>
+          </a:xfrm>
+          <a:prstGeom prst="rect">
+            <a:avLst/>
+          </a:prstGeom>
+        </p:spPr>
+      </p:pic>
+      <p:sp>
+        <p:nvSpPr>
+          <p:cNvPr id="4" name="Shape 1"/>
+          <p:cNvSpPr/>
+          <p:nvPr/>
+        </p:nvSpPr>
+        <p:spPr>
+          <a:xfrm>
+            <a:off x="0" y="0"/>
+            <a:ext cx="12191695" cy="6858000"/>
+          </a:xfrm>
+          <a:prstGeom prst="rect">
+            <a:avLst/>
+          </a:prstGeom>
+          <a:solidFill>
+            <a:srgbClr val="FFF7E6">
+              <a:alpha val="82000"/>
+            </a:srgbClr>
           </a:solidFill>
           <a:ln w="12700">
             <a:solidFill>
@@ -958,20 +957,20 @@
       </p:sp>
       <p:sp>
         <p:nvSpPr>
-          <p:cNvPr id="5" name="Shape 3"/>
-          <p:cNvSpPr/>
-          <p:nvPr/>
-        </p:nvSpPr>
-        <p:spPr>
-          <a:xfrm>
-            <a:off x="9875520" y="5212080"/>
-            <a:ext cx="2377440" cy="1645920"/>
-          </a:xfrm>
-          <a:prstGeom prst="arc">
-            <a:avLst/>
-          </a:prstGeom>
-          <a:solidFill>
-            <a:srgbClr val="8FD3FF"/>
+          <p:cNvPr id="5" name="Shape 2"/>
+          <p:cNvSpPr/>
+          <p:nvPr/>
+        </p:nvSpPr>
+        <p:spPr>
+          <a:xfrm>
+            <a:off x="5120640" y="822960"/>
+            <a:ext cx="91440" cy="91440"/>
+          </a:xfrm>
+          <a:prstGeom prst="ellipse">
+            <a:avLst/>
+          </a:prstGeom>
+          <a:solidFill>
+            <a:srgbClr val="FFC93C"/>
           </a:solidFill>
           <a:ln w="12700">
             <a:solidFill>
@@ -985,14 +984,68 @@
       </p:sp>
       <p:sp>
         <p:nvSpPr>
-          <p:cNvPr id="6" name="Text 4"/>
+          <p:cNvPr id="6" name="Shape 3"/>
+          <p:cNvSpPr/>
+          <p:nvPr/>
+        </p:nvSpPr>
+        <p:spPr>
+          <a:xfrm>
+            <a:off x="5413248" y="932688"/>
+            <a:ext cx="91440" cy="91440"/>
+          </a:xfrm>
+          <a:prstGeom prst="ellipse">
+            <a:avLst/>
+          </a:prstGeom>
+          <a:solidFill>
+            <a:srgbClr val="FF9EB5"/>
+          </a:solidFill>
+          <a:ln w="12700">
+            <a:solidFill>
+              <a:srgbClr val="333333">
+                <a:alpha val="0"/>
+              </a:srgbClr>
+            </a:solidFill>
+            <a:prstDash val="solid"/>
+          </a:ln>
+        </p:spPr>
+      </p:sp>
+      <p:sp>
+        <p:nvSpPr>
+          <p:cNvPr id="7" name="Shape 4"/>
+          <p:cNvSpPr/>
+          <p:nvPr/>
+        </p:nvSpPr>
+        <p:spPr>
+          <a:xfrm>
+            <a:off x="5705856" y="786384"/>
+            <a:ext cx="91440" cy="91440"/>
+          </a:xfrm>
+          <a:prstGeom prst="ellipse">
+            <a:avLst/>
+          </a:prstGeom>
+          <a:solidFill>
+            <a:srgbClr val="8FD3FF"/>
+          </a:solidFill>
+          <a:ln w="12700">
+            <a:solidFill>
+              <a:srgbClr val="333333">
+                <a:alpha val="0"/>
+              </a:srgbClr>
+            </a:solidFill>
+            <a:prstDash val="solid"/>
+          </a:ln>
+        </p:spPr>
+      </p:sp>
+      <p:sp>
+        <p:nvSpPr>
+          <p:cNvPr id="8" name="Text 5"/>
           <p:cNvSpPr/>
           <p:nvPr/>
         </p:nvSpPr>
         <p:spPr>
           <a:xfrm>
             <a:off x="658368" y="384048"/>
-            <a:ext cx="2011680" cy="164592"/>
+            <a:ext cx="2468880" cy="164592"/>
           </a:xfrm>
           <a:prstGeom prst="rect">
             <a:avLst/>
@@ -1014,11 +1067,11 @@
                 <a:solidFill>
                   <a:srgbClr val="F59E0B"/>
                 </a:solidFill>
-                <a:latin typeface="PingFang SC" pitchFamily="34" charset="0"/>
-                <a:ea typeface="PingFang SC" pitchFamily="34" charset="-122"/>
-                <a:cs typeface="PingFang SC" pitchFamily="34" charset="-120"/>
+                <a:latin typeface="Avenir Next" pitchFamily="34" charset="0"/>
+                <a:ea typeface="Avenir Next" pitchFamily="34" charset="-122"/>
+                <a:cs typeface="Avenir Next" pitchFamily="34" charset="-120"/>
               </a:rPr>
-              <a:t>2026 RESEARCH</a:t>
+              <a:t>AI COURSE</a:t>
             </a:r>
             <a:endParaRPr lang="en-US" sz="750" dirty="0"/>
           </a:p>
@@ -1026,14 +1079,14 @@
       </p:sp>
       <p:sp>
         <p:nvSpPr>
-          <p:cNvPr id="7" name="Text 5"/>
-          <p:cNvSpPr/>
-          <p:nvPr/>
-        </p:nvSpPr>
-        <p:spPr>
-          <a:xfrm>
-            <a:off x="658368" y="658368"/>
-            <a:ext cx="4937760" cy="777240"/>
+          <p:cNvPr id="9" name="Text 6"/>
+          <p:cNvSpPr/>
+          <p:nvPr/>
+        </p:nvSpPr>
+        <p:spPr>
+          <a:xfrm>
+            <a:off x="658368" y="749808"/>
+            <a:ext cx="4937760" cy="822960"/>
           </a:xfrm>
           <a:prstGeom prst="rect">
             <a:avLst/>
@@ -1051,7 +1104,7 @@
               <a:buNone/>
             </a:pPr>
             <a:r>
-              <a:rPr lang="en-US" sz="2500" b="1" dirty="0">
+              <a:rPr lang="en-US" sz="2600" b="1" dirty="0">
                 <a:solidFill>
                   <a:srgbClr val="1F2937"/>
                 </a:solidFill>
@@ -1061,20 +1114,20 @@
               </a:rPr>
               <a:t>2026 AI 应用趋势调研</a:t>
             </a:r>
-            <a:endParaRPr lang="en-US" sz="2500" dirty="0"/>
-          </a:p>
-        </p:txBody>
-      </p:sp>
-      <p:sp>
-        <p:nvSpPr>
-          <p:cNvPr id="8" name="Text 6"/>
-          <p:cNvSpPr/>
-          <p:nvPr/>
-        </p:nvSpPr>
-        <p:spPr>
-          <a:xfrm>
-            <a:off x="694944" y="1426464"/>
-            <a:ext cx="4114800" cy="228600"/>
+            <a:endParaRPr lang="en-US" sz="2600" dirty="0"/>
+          </a:p>
+        </p:txBody>
+      </p:sp>
+      <p:sp>
+        <p:nvSpPr>
+          <p:cNvPr id="10" name="Text 7"/>
+          <p:cNvSpPr/>
+          <p:nvPr/>
+        </p:nvSpPr>
+        <p:spPr>
+          <a:xfrm>
+            <a:off x="694944" y="1536192"/>
+            <a:ext cx="2743200" cy="219456"/>
           </a:xfrm>
           <a:prstGeom prst="rect">
             <a:avLst/>
@@ -1092,7 +1145,7 @@
               <a:buNone/>
             </a:pPr>
             <a:r>
-              <a:rPr lang="en-US" sz="1050" b="1" dirty="0">
+              <a:rPr lang="en-US" sz="1080" b="1" dirty="0">
                 <a:solidFill>
                   <a:srgbClr val="F59E0B"/>
                 </a:solidFill>
@@ -1102,20 +1155,20 @@
               </a:rPr>
               <a:t>培训课程样张</a:t>
             </a:r>
-            <a:endParaRPr lang="en-US" sz="1050" dirty="0"/>
-          </a:p>
-        </p:txBody>
-      </p:sp>
-      <p:sp>
-        <p:nvSpPr>
-          <p:cNvPr id="9" name="Shape 7"/>
+            <a:endParaRPr lang="en-US" sz="1080" dirty="0"/>
+          </a:p>
+        </p:txBody>
+      </p:sp>
+      <p:sp>
+        <p:nvSpPr>
+          <p:cNvPr id="11" name="Shape 8"/>
           <p:cNvSpPr/>
           <p:nvPr/>
         </p:nvSpPr>
         <p:spPr>
           <a:xfrm>
             <a:off x="2743200" y="1874520"/>
-            <a:ext cx="4251960" cy="0"/>
+            <a:ext cx="914400" cy="0"/>
           </a:xfrm>
           <a:prstGeom prst="line">
             <a:avLst/>
@@ -1124,7 +1177,7 @@
           <a:ln w="15240">
             <a:solidFill>
               <a:srgbClr val="F59E0B">
-                <a:alpha val="82000"/>
+                <a:alpha val="88000"/>
               </a:srgbClr>
             </a:solidFill>
             <a:prstDash val="solid"/>
@@ -1133,14 +1186,14 @@
       </p:sp>
       <p:sp>
         <p:nvSpPr>
-          <p:cNvPr id="10" name="Text 8"/>
-          <p:cNvSpPr/>
-          <p:nvPr/>
-        </p:nvSpPr>
-        <p:spPr>
-          <a:xfrm>
-            <a:off x="2743200" y="2057400"/>
-            <a:ext cx="1645920" cy="256032"/>
+          <p:cNvPr id="12" name="Text 9"/>
+          <p:cNvSpPr/>
+          <p:nvPr/>
+        </p:nvSpPr>
+        <p:spPr>
+          <a:xfrm>
+            <a:off x="2761488" y="2048256"/>
+            <a:ext cx="2011680" cy="256032"/>
           </a:xfrm>
           <a:prstGeom prst="rect">
             <a:avLst/>
@@ -1174,14 +1227,14 @@
       </p:sp>
       <p:sp>
         <p:nvSpPr>
-          <p:cNvPr id="11" name="Text 9"/>
-          <p:cNvSpPr/>
-          <p:nvPr/>
-        </p:nvSpPr>
-        <p:spPr>
-          <a:xfrm>
-            <a:off x="2743200" y="2560320"/>
-            <a:ext cx="3749040" cy="603504"/>
+          <p:cNvPr id="13" name="Text 10"/>
+          <p:cNvSpPr/>
+          <p:nvPr/>
+        </p:nvSpPr>
+        <p:spPr>
+          <a:xfrm>
+            <a:off x="2761488" y="2542032"/>
+            <a:ext cx="3611880" cy="640080"/>
           </a:xfrm>
           <a:prstGeom prst="rect">
             <a:avLst/>
@@ -1215,13 +1268,13 @@
       </p:sp>
       <p:sp>
         <p:nvSpPr>
-          <p:cNvPr id="12" name="Shape 10"/>
-          <p:cNvSpPr/>
-          <p:nvPr/>
-        </p:nvSpPr>
-        <p:spPr>
-          <a:xfrm>
-            <a:off x="2761488" y="3355848"/>
+          <p:cNvPr id="14" name="Shape 11"/>
+          <p:cNvSpPr/>
+          <p:nvPr/>
+        </p:nvSpPr>
+        <p:spPr>
+          <a:xfrm>
+            <a:off x="2779776" y="3310128"/>
             <a:ext cx="73152" cy="73152"/>
           </a:xfrm>
           <a:prstGeom prst="ellipse">
@@ -1242,14 +1295,14 @@
       </p:sp>
       <p:sp>
         <p:nvSpPr>
-          <p:cNvPr id="13" name="Text 11"/>
-          <p:cNvSpPr/>
-          <p:nvPr/>
-        </p:nvSpPr>
-        <p:spPr>
-          <a:xfrm>
-            <a:off x="2926080" y="3300984"/>
-            <a:ext cx="3291840" cy="164592"/>
+          <p:cNvPr id="15" name="Text 12"/>
+          <p:cNvSpPr/>
+          <p:nvPr/>
+        </p:nvSpPr>
+        <p:spPr>
+          <a:xfrm>
+            <a:off x="2944368" y="3255264"/>
+            <a:ext cx="3246120" cy="164592"/>
           </a:xfrm>
           <a:prstGeom prst="rect">
             <a:avLst/>
@@ -1283,13 +1336,13 @@
       </p:sp>
       <p:sp>
         <p:nvSpPr>
-          <p:cNvPr id="14" name="Shape 12"/>
-          <p:cNvSpPr/>
-          <p:nvPr/>
-        </p:nvSpPr>
-        <p:spPr>
-          <a:xfrm>
-            <a:off x="2761488" y="3685032"/>
+          <p:cNvPr id="16" name="Shape 13"/>
+          <p:cNvSpPr/>
+          <p:nvPr/>
+        </p:nvSpPr>
+        <p:spPr>
+          <a:xfrm>
+            <a:off x="2779776" y="3657600"/>
             <a:ext cx="73152" cy="73152"/>
           </a:xfrm>
           <a:prstGeom prst="ellipse">
@@ -1310,14 +1363,14 @@
       </p:sp>
       <p:sp>
         <p:nvSpPr>
-          <p:cNvPr id="15" name="Text 13"/>
-          <p:cNvSpPr/>
-          <p:nvPr/>
-        </p:nvSpPr>
-        <p:spPr>
-          <a:xfrm>
-            <a:off x="2926080" y="3630168"/>
-            <a:ext cx="3291840" cy="164592"/>
+          <p:cNvPr id="17" name="Text 14"/>
+          <p:cNvSpPr/>
+          <p:nvPr/>
+        </p:nvSpPr>
+        <p:spPr>
+          <a:xfrm>
+            <a:off x="2944368" y="3602736"/>
+            <a:ext cx="3246120" cy="164592"/>
           </a:xfrm>
           <a:prstGeom prst="rect">
             <a:avLst/>
@@ -1351,13 +1404,13 @@
       </p:sp>
       <p:sp>
         <p:nvSpPr>
-          <p:cNvPr id="16" name="Shape 14"/>
-          <p:cNvSpPr/>
-          <p:nvPr/>
-        </p:nvSpPr>
-        <p:spPr>
-          <a:xfrm>
-            <a:off x="2761488" y="4014216"/>
+          <p:cNvPr id="18" name="Shape 15"/>
+          <p:cNvSpPr/>
+          <p:nvPr/>
+        </p:nvSpPr>
+        <p:spPr>
+          <a:xfrm>
+            <a:off x="2779776" y="4005072"/>
             <a:ext cx="73152" cy="73152"/>
           </a:xfrm>
           <a:prstGeom prst="ellipse">
@@ -1378,14 +1431,14 @@
       </p:sp>
       <p:sp>
         <p:nvSpPr>
-          <p:cNvPr id="17" name="Text 15"/>
-          <p:cNvSpPr/>
-          <p:nvPr/>
-        </p:nvSpPr>
-        <p:spPr>
-          <a:xfrm>
-            <a:off x="2926080" y="3959352"/>
-            <a:ext cx="3291840" cy="164592"/>
+          <p:cNvPr id="19" name="Text 16"/>
+          <p:cNvSpPr/>
+          <p:nvPr/>
+        </p:nvSpPr>
+        <p:spPr>
+          <a:xfrm>
+            <a:off x="2944368" y="3950208"/>
+            <a:ext cx="3246120" cy="164592"/>
           </a:xfrm>
           <a:prstGeom prst="rect">
             <a:avLst/>
@@ -1419,13 +1472,13 @@
       </p:sp>
       <p:sp>
         <p:nvSpPr>
-          <p:cNvPr id="18" name="Shape 16"/>
-          <p:cNvSpPr/>
-          <p:nvPr/>
-        </p:nvSpPr>
-        <p:spPr>
-          <a:xfrm>
-            <a:off x="2651760" y="4983480"/>
+          <p:cNvPr id="20" name="Shape 17"/>
+          <p:cNvSpPr/>
+          <p:nvPr/>
+        </p:nvSpPr>
+        <p:spPr>
+          <a:xfrm>
+            <a:off x="2670048" y="5010912"/>
             <a:ext cx="530352" cy="0"/>
           </a:xfrm>
           <a:prstGeom prst="line">
@@ -1435,7 +1488,7 @@
           <a:ln w="25400">
             <a:solidFill>
               <a:srgbClr val="F59E0B">
-                <a:alpha val="88000"/>
+                <a:alpha val="92000"/>
               </a:srgbClr>
             </a:solidFill>
             <a:prstDash val="solid"/>
@@ -1444,14 +1497,14 @@
       </p:sp>
       <p:sp>
         <p:nvSpPr>
-          <p:cNvPr id="19" name="Text 17"/>
-          <p:cNvSpPr/>
-          <p:nvPr/>
-        </p:nvSpPr>
-        <p:spPr>
-          <a:xfrm>
-            <a:off x="2651760" y="5111496"/>
-            <a:ext cx="1527048" cy="329184"/>
+          <p:cNvPr id="21" name="Text 18"/>
+          <p:cNvSpPr/>
+          <p:nvPr/>
+        </p:nvSpPr>
+        <p:spPr>
+          <a:xfrm>
+            <a:off x="2670048" y="5138928"/>
+            <a:ext cx="1426464" cy="329184"/>
           </a:xfrm>
           <a:prstGeom prst="rect">
             <a:avLst/>
@@ -1485,14 +1538,14 @@
       </p:sp>
       <p:sp>
         <p:nvSpPr>
-          <p:cNvPr id="20" name="Text 18"/>
-          <p:cNvSpPr/>
-          <p:nvPr/>
-        </p:nvSpPr>
-        <p:spPr>
-          <a:xfrm>
-            <a:off x="2651760" y="5477256"/>
-            <a:ext cx="1527048" cy="228600"/>
+          <p:cNvPr id="22" name="Text 19"/>
+          <p:cNvSpPr/>
+          <p:nvPr/>
+        </p:nvSpPr>
+        <p:spPr>
+          <a:xfrm>
+            <a:off x="2670048" y="5504688"/>
+            <a:ext cx="1426464" cy="228600"/>
           </a:xfrm>
           <a:prstGeom prst="rect">
             <a:avLst/>
@@ -1526,13 +1579,13 @@
       </p:sp>
       <p:sp>
         <p:nvSpPr>
-          <p:cNvPr id="21" name="Shape 19"/>
-          <p:cNvSpPr/>
-          <p:nvPr/>
-        </p:nvSpPr>
-        <p:spPr>
-          <a:xfrm>
-            <a:off x="4343400" y="4983480"/>
+          <p:cNvPr id="23" name="Shape 20"/>
+          <p:cNvSpPr/>
+          <p:nvPr/>
+        </p:nvSpPr>
+        <p:spPr>
+          <a:xfrm>
+            <a:off x="4242816" y="5010912"/>
             <a:ext cx="530352" cy="0"/>
           </a:xfrm>
           <a:prstGeom prst="line">
@@ -1542,7 +1595,7 @@
           <a:ln w="25400">
             <a:solidFill>
               <a:srgbClr val="FF7AA2">
-                <a:alpha val="88000"/>
+                <a:alpha val="92000"/>
               </a:srgbClr>
             </a:solidFill>
             <a:prstDash val="solid"/>
@@ -1551,14 +1604,14 @@
       </p:sp>
       <p:sp>
         <p:nvSpPr>
-          <p:cNvPr id="22" name="Text 20"/>
-          <p:cNvSpPr/>
-          <p:nvPr/>
-        </p:nvSpPr>
-        <p:spPr>
-          <a:xfrm>
-            <a:off x="4343400" y="5111496"/>
-            <a:ext cx="1527048" cy="329184"/>
+          <p:cNvPr id="24" name="Text 21"/>
+          <p:cNvSpPr/>
+          <p:nvPr/>
+        </p:nvSpPr>
+        <p:spPr>
+          <a:xfrm>
+            <a:off x="4242816" y="5138928"/>
+            <a:ext cx="1426464" cy="329184"/>
           </a:xfrm>
           <a:prstGeom prst="rect">
             <a:avLst/>
@@ -1592,14 +1645,14 @@
       </p:sp>
       <p:sp>
         <p:nvSpPr>
-          <p:cNvPr id="23" name="Text 21"/>
-          <p:cNvSpPr/>
-          <p:nvPr/>
-        </p:nvSpPr>
-        <p:spPr>
-          <a:xfrm>
-            <a:off x="4343400" y="5477256"/>
-            <a:ext cx="1527048" cy="228600"/>
+          <p:cNvPr id="25" name="Text 22"/>
+          <p:cNvSpPr/>
+          <p:nvPr/>
+        </p:nvSpPr>
+        <p:spPr>
+          <a:xfrm>
+            <a:off x="4242816" y="5504688"/>
+            <a:ext cx="1426464" cy="228600"/>
           </a:xfrm>
           <a:prstGeom prst="rect">
             <a:avLst/>
@@ -1633,13 +1686,13 @@
       </p:sp>
       <p:sp>
         <p:nvSpPr>
-          <p:cNvPr id="24" name="Shape 22"/>
-          <p:cNvSpPr/>
-          <p:nvPr/>
-        </p:nvSpPr>
-        <p:spPr>
-          <a:xfrm>
-            <a:off x="6035040" y="4983480"/>
+          <p:cNvPr id="26" name="Shape 23"/>
+          <p:cNvSpPr/>
+          <p:nvPr/>
+        </p:nvSpPr>
+        <p:spPr>
+          <a:xfrm>
+            <a:off x="5815584" y="5010912"/>
             <a:ext cx="530352" cy="0"/>
           </a:xfrm>
           <a:prstGeom prst="line">
@@ -1649,7 +1702,7 @@
           <a:ln w="25400">
             <a:solidFill>
               <a:srgbClr val="F59E0B">
-                <a:alpha val="88000"/>
+                <a:alpha val="92000"/>
               </a:srgbClr>
             </a:solidFill>
             <a:prstDash val="solid"/>
@@ -1658,14 +1711,14 @@
       </p:sp>
       <p:sp>
         <p:nvSpPr>
-          <p:cNvPr id="25" name="Text 23"/>
-          <p:cNvSpPr/>
-          <p:nvPr/>
-        </p:nvSpPr>
-        <p:spPr>
-          <a:xfrm>
-            <a:off x="6035040" y="5111496"/>
-            <a:ext cx="1527048" cy="329184"/>
+          <p:cNvPr id="27" name="Text 24"/>
+          <p:cNvSpPr/>
+          <p:nvPr/>
+        </p:nvSpPr>
+        <p:spPr>
+          <a:xfrm>
+            <a:off x="5815584" y="5138928"/>
+            <a:ext cx="1426464" cy="329184"/>
           </a:xfrm>
           <a:prstGeom prst="rect">
             <a:avLst/>
@@ -1699,14 +1752,14 @@
       </p:sp>
       <p:sp>
         <p:nvSpPr>
-          <p:cNvPr id="26" name="Text 24"/>
-          <p:cNvSpPr/>
-          <p:nvPr/>
-        </p:nvSpPr>
-        <p:spPr>
-          <a:xfrm>
-            <a:off x="6035040" y="5477256"/>
-            <a:ext cx="1527048" cy="228600"/>
+          <p:cNvPr id="28" name="Text 25"/>
+          <p:cNvSpPr/>
+          <p:nvPr/>
+        </p:nvSpPr>
+        <p:spPr>
+          <a:xfrm>
+            <a:off x="5815584" y="5504688"/>
+            <a:ext cx="1426464" cy="228600"/>
           </a:xfrm>
           <a:prstGeom prst="rect">
             <a:avLst/>
@@ -1740,14 +1793,14 @@
       </p:sp>
       <p:sp>
         <p:nvSpPr>
-          <p:cNvPr id="27" name="Text 25"/>
-          <p:cNvSpPr/>
-          <p:nvPr/>
-        </p:nvSpPr>
-        <p:spPr>
-          <a:xfrm>
-            <a:off x="6793992" y="1764792"/>
-            <a:ext cx="2011680" cy="237744"/>
+          <p:cNvPr id="29" name="Text 26"/>
+          <p:cNvSpPr/>
+          <p:nvPr/>
+        </p:nvSpPr>
+        <p:spPr>
+          <a:xfrm>
+            <a:off x="6812280" y="1719072"/>
+            <a:ext cx="2377440" cy="237744"/>
           </a:xfrm>
           <a:prstGeom prst="rect">
             <a:avLst/>
@@ -1773,7 +1826,7 @@
                 <a:ea typeface="PingFang SC" pitchFamily="34" charset="-122"/>
                 <a:cs typeface="PingFang SC" pitchFamily="34" charset="-120"/>
               </a:rPr>
-              <a:t>趋势指数</a:t>
+              <a:t>学习热度</a:t>
             </a:r>
             <a:endParaRPr lang="en-US" sz="1350" dirty="0"/>
           </a:p>
@@ -1781,14 +1834,14 @@
       </p:sp>
       <p:sp>
         <p:nvSpPr>
-          <p:cNvPr id="28" name="Shape 26"/>
-          <p:cNvSpPr/>
-          <p:nvPr/>
-        </p:nvSpPr>
-        <p:spPr>
-          <a:xfrm>
-            <a:off x="6793992" y="2148840"/>
-            <a:ext cx="3840480" cy="0"/>
+          <p:cNvPr id="30" name="Shape 27"/>
+          <p:cNvSpPr/>
+          <p:nvPr/>
+        </p:nvSpPr>
+        <p:spPr>
+          <a:xfrm>
+            <a:off x="6565392" y="2011680"/>
+            <a:ext cx="3931920" cy="0"/>
           </a:xfrm>
           <a:prstGeom prst="line">
             <a:avLst/>
@@ -1806,14 +1859,14 @@
       </p:sp>
       <p:sp>
         <p:nvSpPr>
-          <p:cNvPr id="29" name="Shape 27"/>
-          <p:cNvSpPr/>
-          <p:nvPr/>
-        </p:nvSpPr>
-        <p:spPr>
-          <a:xfrm>
-            <a:off x="6720840" y="4745736"/>
-            <a:ext cx="3840480" cy="0"/>
+          <p:cNvPr id="31" name="Shape 28"/>
+          <p:cNvSpPr/>
+          <p:nvPr/>
+        </p:nvSpPr>
+        <p:spPr>
+          <a:xfrm>
+            <a:off x="6565392" y="4773168"/>
+            <a:ext cx="3931920" cy="0"/>
           </a:xfrm>
           <a:prstGeom prst="line">
             <a:avLst/>
@@ -1831,14 +1884,14 @@
       </p:sp>
       <p:sp>
         <p:nvSpPr>
-          <p:cNvPr id="30" name="Shape 28"/>
-          <p:cNvSpPr/>
-          <p:nvPr/>
-        </p:nvSpPr>
-        <p:spPr>
-          <a:xfrm>
-            <a:off x="6922008" y="3808659"/>
-            <a:ext cx="708660" cy="937077"/>
+          <p:cNvPr id="32" name="Shape 29"/>
+          <p:cNvSpPr/>
+          <p:nvPr/>
+        </p:nvSpPr>
+        <p:spPr>
+          <a:xfrm>
+            <a:off x="6766560" y="3851453"/>
+            <a:ext cx="731520" cy="921715"/>
           </a:xfrm>
           <a:prstGeom prst="rect">
             <a:avLst/>
@@ -1858,14 +1911,41 @@
       </p:sp>
       <p:sp>
         <p:nvSpPr>
-          <p:cNvPr id="31" name="Text 29"/>
-          <p:cNvSpPr/>
-          <p:nvPr/>
-        </p:nvSpPr>
-        <p:spPr>
-          <a:xfrm>
-            <a:off x="6885432" y="4873752"/>
-            <a:ext cx="781812" cy="164592"/>
+          <p:cNvPr id="33" name="Shape 30"/>
+          <p:cNvSpPr/>
+          <p:nvPr/>
+        </p:nvSpPr>
+        <p:spPr>
+          <a:xfrm>
+            <a:off x="7068312" y="3778301"/>
+            <a:ext cx="128016" cy="128016"/>
+          </a:xfrm>
+          <a:prstGeom prst="ellipse">
+            <a:avLst/>
+          </a:prstGeom>
+          <a:solidFill>
+            <a:srgbClr val="F59E0B"/>
+          </a:solidFill>
+          <a:ln w="12700">
+            <a:solidFill>
+              <a:srgbClr val="333333">
+                <a:alpha val="0"/>
+              </a:srgbClr>
+            </a:solidFill>
+            <a:prstDash val="solid"/>
+          </a:ln>
+        </p:spPr>
+      </p:sp>
+      <p:sp>
+        <p:nvSpPr>
+          <p:cNvPr id="34" name="Text 31"/>
+          <p:cNvSpPr/>
+          <p:nvPr/>
+        </p:nvSpPr>
+        <p:spPr>
+          <a:xfrm>
+            <a:off x="6729984" y="4901184"/>
+            <a:ext cx="804672" cy="164592"/>
           </a:xfrm>
           <a:prstGeom prst="rect">
             <a:avLst/>
@@ -1899,14 +1979,14 @@
       </p:sp>
       <p:sp>
         <p:nvSpPr>
-          <p:cNvPr id="32" name="Shape 30"/>
-          <p:cNvSpPr/>
-          <p:nvPr/>
-        </p:nvSpPr>
-        <p:spPr>
-          <a:xfrm>
-            <a:off x="7831836" y="3317809"/>
-            <a:ext cx="708660" cy="1427927"/>
+          <p:cNvPr id="35" name="Shape 32"/>
+          <p:cNvSpPr/>
+          <p:nvPr/>
+        </p:nvSpPr>
+        <p:spPr>
+          <a:xfrm>
+            <a:off x="7699248" y="3288182"/>
+            <a:ext cx="731520" cy="1484986"/>
           </a:xfrm>
           <a:prstGeom prst="rect">
             <a:avLst/>
@@ -1926,14 +2006,41 @@
       </p:sp>
       <p:sp>
         <p:nvSpPr>
-          <p:cNvPr id="33" name="Text 31"/>
-          <p:cNvSpPr/>
-          <p:nvPr/>
-        </p:nvSpPr>
-        <p:spPr>
-          <a:xfrm>
-            <a:off x="7795260" y="4873752"/>
-            <a:ext cx="781812" cy="164592"/>
+          <p:cNvPr id="36" name="Shape 33"/>
+          <p:cNvSpPr/>
+          <p:nvPr/>
+        </p:nvSpPr>
+        <p:spPr>
+          <a:xfrm>
+            <a:off x="8001000" y="3215030"/>
+            <a:ext cx="128016" cy="128016"/>
+          </a:xfrm>
+          <a:prstGeom prst="ellipse">
+            <a:avLst/>
+          </a:prstGeom>
+          <a:solidFill>
+            <a:srgbClr val="FF7AA2"/>
+          </a:solidFill>
+          <a:ln w="12700">
+            <a:solidFill>
+              <a:srgbClr val="333333">
+                <a:alpha val="0"/>
+              </a:srgbClr>
+            </a:solidFill>
+            <a:prstDash val="solid"/>
+          </a:ln>
+        </p:spPr>
+      </p:sp>
+      <p:sp>
+        <p:nvSpPr>
+          <p:cNvPr id="37" name="Text 34"/>
+          <p:cNvSpPr/>
+          <p:nvPr/>
+        </p:nvSpPr>
+        <p:spPr>
+          <a:xfrm>
+            <a:off x="7662672" y="4901184"/>
+            <a:ext cx="804672" cy="164592"/>
           </a:xfrm>
           <a:prstGeom prst="rect">
             <a:avLst/>
@@ -1967,14 +2074,14 @@
       </p:sp>
       <p:sp>
         <p:nvSpPr>
-          <p:cNvPr id="34" name="Shape 32"/>
-          <p:cNvSpPr/>
-          <p:nvPr/>
-        </p:nvSpPr>
-        <p:spPr>
-          <a:xfrm>
-            <a:off x="8741664" y="3005450"/>
-            <a:ext cx="708660" cy="1740286"/>
+          <p:cNvPr id="38" name="Shape 35"/>
+          <p:cNvSpPr/>
+          <p:nvPr/>
+        </p:nvSpPr>
+        <p:spPr>
+          <a:xfrm>
+            <a:off x="8631936" y="2878531"/>
+            <a:ext cx="731520" cy="1894637"/>
           </a:xfrm>
           <a:prstGeom prst="rect">
             <a:avLst/>
@@ -1994,14 +2101,41 @@
       </p:sp>
       <p:sp>
         <p:nvSpPr>
-          <p:cNvPr id="35" name="Text 33"/>
-          <p:cNvSpPr/>
-          <p:nvPr/>
-        </p:nvSpPr>
-        <p:spPr>
-          <a:xfrm>
-            <a:off x="8705088" y="4873752"/>
-            <a:ext cx="781812" cy="164592"/>
+          <p:cNvPr id="39" name="Shape 36"/>
+          <p:cNvSpPr/>
+          <p:nvPr/>
+        </p:nvSpPr>
+        <p:spPr>
+          <a:xfrm>
+            <a:off x="8933688" y="2805379"/>
+            <a:ext cx="128016" cy="128016"/>
+          </a:xfrm>
+          <a:prstGeom prst="ellipse">
+            <a:avLst/>
+          </a:prstGeom>
+          <a:solidFill>
+            <a:srgbClr val="F59E0B"/>
+          </a:solidFill>
+          <a:ln w="12700">
+            <a:solidFill>
+              <a:srgbClr val="333333">
+                <a:alpha val="0"/>
+              </a:srgbClr>
+            </a:solidFill>
+            <a:prstDash val="solid"/>
+          </a:ln>
+        </p:spPr>
+      </p:sp>
+      <p:sp>
+        <p:nvSpPr>
+          <p:cNvPr id="40" name="Text 37"/>
+          <p:cNvSpPr/>
+          <p:nvPr/>
+        </p:nvSpPr>
+        <p:spPr>
+          <a:xfrm>
+            <a:off x="8595360" y="4901184"/>
+            <a:ext cx="804672" cy="164592"/>
           </a:xfrm>
           <a:prstGeom prst="rect">
             <a:avLst/>
@@ -2035,14 +2169,14 @@
       </p:sp>
       <p:sp>
         <p:nvSpPr>
-          <p:cNvPr id="36" name="Shape 34"/>
-          <p:cNvSpPr/>
-          <p:nvPr/>
-        </p:nvSpPr>
-        <p:spPr>
-          <a:xfrm>
-            <a:off x="9651492" y="2715402"/>
-            <a:ext cx="708660" cy="2030334"/>
+          <p:cNvPr id="41" name="Shape 38"/>
+          <p:cNvSpPr/>
+          <p:nvPr/>
+        </p:nvSpPr>
+        <p:spPr>
+          <a:xfrm>
+            <a:off x="9564624" y="2571293"/>
+            <a:ext cx="731520" cy="2201875"/>
           </a:xfrm>
           <a:prstGeom prst="rect">
             <a:avLst/>
@@ -2062,14 +2196,41 @@
       </p:sp>
       <p:sp>
         <p:nvSpPr>
-          <p:cNvPr id="37" name="Text 35"/>
-          <p:cNvSpPr/>
-          <p:nvPr/>
-        </p:nvSpPr>
-        <p:spPr>
-          <a:xfrm>
-            <a:off x="9614916" y="4873752"/>
-            <a:ext cx="781812" cy="164592"/>
+          <p:cNvPr id="42" name="Shape 39"/>
+          <p:cNvSpPr/>
+          <p:nvPr/>
+        </p:nvSpPr>
+        <p:spPr>
+          <a:xfrm>
+            <a:off x="9866376" y="2498141"/>
+            <a:ext cx="128016" cy="128016"/>
+          </a:xfrm>
+          <a:prstGeom prst="ellipse">
+            <a:avLst/>
+          </a:prstGeom>
+          <a:solidFill>
+            <a:srgbClr val="FF7AA2"/>
+          </a:solidFill>
+          <a:ln w="12700">
+            <a:solidFill>
+              <a:srgbClr val="333333">
+                <a:alpha val="0"/>
+              </a:srgbClr>
+            </a:solidFill>
+            <a:prstDash val="solid"/>
+          </a:ln>
+        </p:spPr>
+      </p:sp>
+      <p:sp>
+        <p:nvSpPr>
+          <p:cNvPr id="43" name="Text 40"/>
+          <p:cNvSpPr/>
+          <p:nvPr/>
+        </p:nvSpPr>
+        <p:spPr>
+          <a:xfrm>
+            <a:off x="9528048" y="4901184"/>
+            <a:ext cx="804672" cy="164592"/>
           </a:xfrm>
           <a:prstGeom prst="rect">
             <a:avLst/>
@@ -2098,6 +2259,113 @@
               <a:t>复盘</a:t>
             </a:r>
             <a:endParaRPr lang="en-US" sz="680" dirty="0"/>
+          </a:p>
+        </p:txBody>
+      </p:sp>
+      <p:sp>
+        <p:nvSpPr>
+          <p:cNvPr id="44" name="Shape 41"/>
+          <p:cNvSpPr/>
+          <p:nvPr/>
+        </p:nvSpPr>
+        <p:spPr>
+          <a:xfrm>
+            <a:off x="2761488" y="6254496"/>
+            <a:ext cx="475488" cy="0"/>
+          </a:xfrm>
+          <a:prstGeom prst="line">
+            <a:avLst/>
+          </a:prstGeom>
+          <a:noFill/>
+          <a:ln w="19050">
+            <a:solidFill>
+              <a:srgbClr val="F59E0B">
+                <a:alpha val="90000"/>
+              </a:srgbClr>
+            </a:solidFill>
+            <a:prstDash val="solid"/>
+          </a:ln>
+        </p:spPr>
+      </p:sp>
+      <p:sp>
+        <p:nvSpPr>
+          <p:cNvPr id="45" name="Text 42"/>
+          <p:cNvSpPr/>
+          <p:nvPr/>
+        </p:nvSpPr>
+        <p:spPr>
+          <a:xfrm>
+            <a:off x="3383280" y="6163056"/>
+            <a:ext cx="4023360" cy="164592"/>
+          </a:xfrm>
+          <a:prstGeom prst="rect">
+            <a:avLst/>
+          </a:prstGeom>
+          <a:noFill/>
+          <a:ln/>
+        </p:spPr>
+        <p:txBody>
+          <a:bodyPr wrap="square" lIns="0" tIns="0" rIns="0" bIns="0" rtlCol="0" anchor="ctr">
+            <a:normAutofit/>
+          </a:bodyPr>
+          <a:lstStyle/>
+          <a:p>
+            <a:pPr algn="l" indent="0" marL="0">
+              <a:buNone/>
+            </a:pPr>
+            <a:r>
+              <a:rPr lang="en-US" sz="740" dirty="0">
+                <a:solidFill>
+                  <a:srgbClr val="586174"/>
+                </a:solidFill>
+                <a:latin typeface="PingFang SC" pitchFamily="34" charset="0"/>
+                <a:ea typeface="PingFang SC" pitchFamily="34" charset="-122"/>
+                <a:cs typeface="PingFang SC" pitchFamily="34" charset="-120"/>
+              </a:rPr>
+              <a:t>文字、数字和图表标签均为 PPT 可编辑对象</a:t>
+            </a:r>
+            <a:endParaRPr lang="en-US" sz="740" dirty="0"/>
+          </a:p>
+        </p:txBody>
+      </p:sp>
+      <p:sp>
+        <p:nvSpPr>
+          <p:cNvPr id="46" name="Text 43"/>
+          <p:cNvSpPr/>
+          <p:nvPr/>
+        </p:nvSpPr>
+        <p:spPr>
+          <a:xfrm>
+            <a:off x="9875520" y="6291072"/>
+            <a:ext cx="914400" cy="146304"/>
+          </a:xfrm>
+          <a:prstGeom prst="rect">
+            <a:avLst/>
+          </a:prstGeom>
+          <a:noFill/>
+          <a:ln/>
+        </p:spPr>
+        <p:txBody>
+          <a:bodyPr wrap="square" lIns="0" tIns="0" rIns="0" bIns="0" rtlCol="0" anchor="ctr">
+            <a:normAutofit/>
+          </a:bodyPr>
+          <a:lstStyle/>
+          <a:p>
+            <a:pPr algn="r" indent="0" marL="0">
+              <a:buNone/>
+            </a:pPr>
+            <a:r>
+              <a:rPr lang="en-US" sz="720" b="1" dirty="0">
+                <a:solidFill>
+                  <a:srgbClr val="F59E0B"/>
+                </a:solidFill>
+                <a:latin typeface="Avenir Next" pitchFamily="34" charset="0"/>
+                <a:ea typeface="Avenir Next" pitchFamily="34" charset="-122"/>
+                <a:cs typeface="Avenir Next" pitchFamily="34" charset="-120"/>
+              </a:rPr>
+              <a:t>活泼动漫</a:t>
+            </a:r>
+            <a:endParaRPr lang="en-US" sz="720" dirty="0"/>
           </a:p>
         </p:txBody>
       </p:sp>
